--- a/Communacation/EDA.pptx
+++ b/Communacation/EDA.pptx
@@ -2448,17 +2448,6 @@
               </a:lnSpc>
               <a:buNone/>
             </a:pPr>
-            <a:r>
-              <a:rPr lang="en-US" sz="1550" dirty="0">
-                <a:solidFill>
-                  <a:srgbClr val="D6E5EF"/>
-                </a:solidFill>
-                <a:latin typeface="Source Sans 3" pitchFamily="34" charset="0"/>
-                <a:ea typeface="Source Sans 3" pitchFamily="34" charset="-122"/>
-                <a:cs typeface="Source Sans 3" pitchFamily="34" charset="-120"/>
-              </a:rPr>
-              <a:t>A practical walkthrough of the EDA process.</a:t>
-            </a:r>
             <a:endParaRPr lang="en-US" sz="1550" dirty="0"/>
           </a:p>
         </p:txBody>
@@ -2578,96 +2567,6 @@
       </p:pic>
       <p:sp>
         <p:nvSpPr>
-          <p:cNvPr id="3" name="Shape 0"/>
-          <p:cNvSpPr/>
-          <p:nvPr/>
-        </p:nvSpPr>
-        <p:spPr>
-          <a:xfrm>
-            <a:off x="698104" y="1986657"/>
-            <a:ext cx="1192113" cy="374848"/>
-          </a:xfrm>
-          <a:prstGeom prst="roundRect">
-            <a:avLst>
-              <a:gd name="adj" fmla="val 6386"/>
-            </a:avLst>
-          </a:prstGeom>
-          <a:solidFill>
-            <a:srgbClr val="49042A"/>
-          </a:solidFill>
-          <a:ln/>
-        </p:spPr>
-      </p:sp>
-      <p:sp>
-        <p:nvSpPr>
-          <p:cNvPr id="4" name="Text 1"/>
-          <p:cNvSpPr/>
-          <p:nvPr/>
-        </p:nvSpPr>
-        <p:spPr>
-          <a:xfrm>
-            <a:off x="817762" y="2046486"/>
-            <a:ext cx="1562397" cy="255191"/>
-          </a:xfrm>
-          <a:prstGeom prst="rect">
-            <a:avLst/>
-          </a:prstGeom>
-          <a:noFill/>
-          <a:ln/>
-        </p:spPr>
-        <p:txBody>
-          <a:bodyPr wrap="none" lIns="0" tIns="0" rIns="0" bIns="0" rtlCol="0" anchor="t"/>
-          <a:lstStyle/>
-          <a:p>
-            <a:pPr>
-              <a:lnSpc>
-                <a:spcPct val="133000"/>
-              </a:lnSpc>
-            </a:pPr>
-            <a:r>
-              <a:rPr lang="en-US" sz="1200" dirty="0">
-                <a:solidFill>
-                  <a:srgbClr val="D6E5EF"/>
-                </a:solidFill>
-                <a:latin typeface="Source Sans 3" pitchFamily="34" charset="0"/>
-                <a:ea typeface="Source Sans 3" pitchFamily="34" charset="-122"/>
-                <a:cs typeface="Source Sans 3" pitchFamily="34" charset="-120"/>
-              </a:rPr>
-              <a:t>DATA SCIENCE</a:t>
-            </a:r>
-            <a:endParaRPr lang="en-US" sz="1200" dirty="0"/>
-          </a:p>
-        </p:txBody>
-      </p:sp>
-      <p:sp>
-        <p:nvSpPr>
-          <p:cNvPr id="5" name="Shape 2"/>
-          <p:cNvSpPr/>
-          <p:nvPr/>
-        </p:nvSpPr>
-        <p:spPr>
-          <a:xfrm>
-            <a:off x="1989931" y="1986657"/>
-            <a:ext cx="2228751" cy="374848"/>
-          </a:xfrm>
-          <a:prstGeom prst="roundRect">
-            <a:avLst>
-              <a:gd name="adj" fmla="val 6386"/>
-            </a:avLst>
-          </a:prstGeom>
-          <a:noFill/>
-          <a:ln/>
-          <a:effectLst>
-            <a:outerShdw blurRad="101600" dist="50800" dir="16200000" algn="bl" rotWithShape="0">
-              <a:srgbClr val="F98AC7">
-                <a:alpha val="100000"/>
-              </a:srgbClr>
-            </a:outerShdw>
-          </a:effectLst>
-        </p:spPr>
-      </p:sp>
-      <p:sp>
-        <p:nvSpPr>
           <p:cNvPr id="6" name="Text 3"/>
           <p:cNvSpPr/>
           <p:nvPr/>
@@ -2692,17 +2591,6 @@
                 <a:spcPct val="133000"/>
               </a:lnSpc>
             </a:pPr>
-            <a:r>
-              <a:rPr lang="en-US" sz="1200" dirty="0">
-                <a:solidFill>
-                  <a:srgbClr val="F98AC7"/>
-                </a:solidFill>
-                <a:latin typeface="Source Sans 3" pitchFamily="34" charset="0"/>
-                <a:ea typeface="Source Sans 3" pitchFamily="34" charset="-122"/>
-                <a:cs typeface="Source Sans 3" pitchFamily="34" charset="-120"/>
-              </a:rPr>
-              <a:t>EXPLORATORY DATA ANALYSIS</a:t>
-            </a:r>
             <a:endParaRPr lang="en-US" sz="1200" dirty="0"/>
           </a:p>
         </p:txBody>
@@ -8288,7 +8176,7 @@
               <a:buNone/>
             </a:pPr>
             <a:r>
-              <a:rPr lang="en-US" sz="1550" dirty="0">
+              <a:rPr lang="en-US" sz="1200" dirty="0">
                 <a:solidFill>
                   <a:srgbClr val="D6E5EF"/>
                 </a:solidFill>
@@ -8298,7 +8186,7 @@
               </a:rPr>
               <a:t>Definition, importance, and how it differs from preprocessing</a:t>
             </a:r>
-            <a:endParaRPr lang="en-US" sz="1550" dirty="0"/>
+            <a:endParaRPr lang="en-US" sz="1200" dirty="0"/>
           </a:p>
         </p:txBody>
       </p:sp>
@@ -8436,7 +8324,7 @@
               <a:buNone/>
             </a:pPr>
             <a:r>
-              <a:rPr lang="en-US" sz="1550" dirty="0">
+              <a:rPr lang="en-US" sz="1200" dirty="0">
                 <a:solidFill>
                   <a:srgbClr val="D6E5EF"/>
                 </a:solidFill>
@@ -8446,7 +8334,7 @@
               </a:rPr>
               <a:t>End-to-end pipeline from business problem to ML readiness</a:t>
             </a:r>
-            <a:endParaRPr lang="en-US" sz="1550" dirty="0"/>
+            <a:endParaRPr lang="en-US" sz="1200" dirty="0"/>
           </a:p>
         </p:txBody>
       </p:sp>
@@ -8584,7 +8472,7 @@
               <a:buNone/>
             </a:pPr>
             <a:r>
-              <a:rPr lang="en-US" sz="1550" dirty="0">
+              <a:rPr lang="en-US" sz="1200" dirty="0">
                 <a:solidFill>
                   <a:srgbClr val="D6E5EF"/>
                 </a:solidFill>
@@ -8594,7 +8482,7 @@
               </a:rPr>
               <a:t>Dataset profiling, missing values, duplicates, and formatting</a:t>
             </a:r>
-            <a:endParaRPr lang="en-US" sz="1550" dirty="0"/>
+            <a:endParaRPr lang="en-US" sz="1200" dirty="0"/>
           </a:p>
         </p:txBody>
       </p:sp>
@@ -8730,7 +8618,7 @@
               <a:buNone/>
             </a:pPr>
             <a:r>
-              <a:rPr lang="en-US" sz="1550" dirty="0">
+              <a:rPr lang="en-US" sz="1200" dirty="0">
                 <a:solidFill>
                   <a:srgbClr val="D6E5EF"/>
                 </a:solidFill>
@@ -8740,49 +8628,7 @@
               </a:rPr>
               <a:t>Univariate, bivariate, and multivariate exploration</a:t>
             </a:r>
-            <a:endParaRPr lang="en-US" sz="1550" dirty="0"/>
-          </a:p>
-        </p:txBody>
-      </p:sp>
-      <p:sp>
-        <p:nvSpPr>
-          <p:cNvPr id="20" name="Text 18"/>
-          <p:cNvSpPr/>
-          <p:nvPr/>
-        </p:nvSpPr>
-        <p:spPr>
-          <a:xfrm>
-            <a:off x="6195560" y="4452838"/>
-            <a:ext cx="398949" cy="249337"/>
-          </a:xfrm>
-          <a:prstGeom prst="rect">
-            <a:avLst/>
-          </a:prstGeom>
-          <a:noFill/>
-          <a:ln/>
-        </p:spPr>
-        <p:txBody>
-          <a:bodyPr wrap="none" lIns="0" tIns="0" rIns="0" bIns="0" rtlCol="0" anchor="ctr"/>
-          <a:lstStyle/>
-          <a:p>
-            <a:pPr marL="0" indent="0" algn="l">
-              <a:lnSpc>
-                <a:spcPct val="100000"/>
-              </a:lnSpc>
-              <a:buNone/>
-            </a:pPr>
-            <a:r>
-              <a:rPr lang="en-US" sz="1550" dirty="0">
-                <a:solidFill>
-                  <a:srgbClr val="D6E5EF"/>
-                </a:solidFill>
-                <a:latin typeface="Lora Light" pitchFamily="34" charset="0"/>
-                <a:ea typeface="Lora Light" pitchFamily="34" charset="-122"/>
-                <a:cs typeface="Lora Light" pitchFamily="34" charset="-120"/>
-              </a:rPr>
-              <a:t>05</a:t>
-            </a:r>
-            <a:endParaRPr lang="en-US" sz="1550" dirty="0"/>
+            <a:endParaRPr lang="en-US" sz="1200" dirty="0"/>
           </a:p>
         </p:txBody>
       </p:sp>
@@ -8876,7 +8722,7 @@
               <a:buNone/>
             </a:pPr>
             <a:r>
-              <a:rPr lang="en-US" sz="1550" dirty="0">
+              <a:rPr lang="en-US" sz="1200" dirty="0">
                 <a:solidFill>
                   <a:srgbClr val="D6E5EF"/>
                 </a:solidFill>
@@ -8886,7 +8732,7 @@
               </a:rPr>
               <a:t>Transformations, encoding, selection, and business takeaways</a:t>
             </a:r>
-            <a:endParaRPr lang="en-US" sz="1550" dirty="0"/>
+            <a:endParaRPr lang="en-US" sz="1200" dirty="0"/>
           </a:p>
         </p:txBody>
       </p:sp>
@@ -8945,6 +8791,66 @@
           <a:p>
             <a:pPr algn="ctr"/>
             <a:endParaRPr lang="en-IN"/>
+          </a:p>
+        </p:txBody>
+      </p:sp>
+      <p:sp>
+        <p:nvSpPr>
+          <p:cNvPr id="26" name="TextBox 25">
+            <a:extLst>
+              <a:ext uri="{FF2B5EF4-FFF2-40B4-BE49-F238E27FC236}">
+                <a16:creationId xmlns:a16="http://schemas.microsoft.com/office/drawing/2014/main" id="{146889FE-7301-1ABB-B5D3-2C80592DE187}"/>
+              </a:ext>
+            </a:extLst>
+          </p:cNvPr>
+          <p:cNvSpPr txBox="1"/>
+          <p:nvPr/>
+        </p:nvSpPr>
+        <p:spPr>
+          <a:xfrm>
+            <a:off x="6096000" y="4427995"/>
+            <a:ext cx="6096000" cy="369332"/>
+          </a:xfrm>
+          <a:prstGeom prst="rect">
+            <a:avLst/>
+          </a:prstGeom>
+          <a:noFill/>
+        </p:spPr>
+        <p:txBody>
+          <a:bodyPr wrap="square">
+            <a:spAutoFit/>
+          </a:bodyPr>
+          <a:lstStyle/>
+          <a:p>
+            <a:pPr marL="0" indent="0" algn="l">
+              <a:lnSpc>
+                <a:spcPct val="100000"/>
+              </a:lnSpc>
+              <a:buNone/>
+            </a:pPr>
+            <a:r>
+              <a:rPr lang="en-US" sz="1800" dirty="0">
+                <a:solidFill>
+                  <a:srgbClr val="D6E5EF"/>
+                </a:solidFill>
+                <a:latin typeface="Lora Light" pitchFamily="34" charset="0"/>
+                <a:ea typeface="Lora Light" pitchFamily="34" charset="-122"/>
+                <a:cs typeface="Lora Light" pitchFamily="34" charset="-120"/>
+              </a:rPr>
+              <a:t>0</a:t>
+            </a:r>
+            <a:r>
+              <a:rPr lang="en-US" dirty="0">
+                <a:solidFill>
+                  <a:srgbClr val="D6E5EF"/>
+                </a:solidFill>
+                <a:latin typeface="Lora Light" pitchFamily="34" charset="0"/>
+                <a:ea typeface="Lora Light" pitchFamily="34" charset="-122"/>
+                <a:cs typeface="Lora Light" pitchFamily="34" charset="-120"/>
+              </a:rPr>
+              <a:t>5</a:t>
+            </a:r>
+            <a:endParaRPr lang="en-US" sz="1800" dirty="0"/>
           </a:p>
         </p:txBody>
       </p:sp>
@@ -9027,17 +8933,6 @@
               </a:lnSpc>
               <a:buNone/>
             </a:pPr>
-            <a:r>
-              <a:rPr lang="en-US" sz="1250" dirty="0">
-                <a:solidFill>
-                  <a:srgbClr val="F98AC7"/>
-                </a:solidFill>
-                <a:latin typeface="Source Sans 3" pitchFamily="34" charset="0"/>
-                <a:ea typeface="Source Sans 3" pitchFamily="34" charset="-122"/>
-                <a:cs typeface="Source Sans 3" pitchFamily="34" charset="-120"/>
-              </a:rPr>
-              <a:t>FOUNDATION</a:t>
-            </a:r>
             <a:endParaRPr lang="en-US" sz="1250" dirty="0"/>
           </a:p>
         </p:txBody>
@@ -9263,7 +9158,7 @@
               <a:buNone/>
             </a:pPr>
             <a:r>
-              <a:rPr lang="en-US" sz="1550" dirty="0">
+              <a:rPr lang="en-US" sz="1200" dirty="0">
                 <a:solidFill>
                   <a:srgbClr val="D6E5EF"/>
                 </a:solidFill>
@@ -9274,7 +9169,7 @@
               <a:t>EDA explores and questions; preprocessing fixes and prepares. EDA drives </a:t>
             </a:r>
             <a:r>
-              <a:rPr lang="en-US" sz="1550" i="1" dirty="0">
+              <a:rPr lang="en-US" sz="1200" i="1" dirty="0">
                 <a:solidFill>
                   <a:srgbClr val="D6E5EF"/>
                 </a:solidFill>
@@ -9285,7 +9180,7 @@
               <a:t>what</a:t>
             </a:r>
             <a:r>
-              <a:rPr lang="en-US" sz="1550" dirty="0">
+              <a:rPr lang="en-US" sz="1200" dirty="0">
                 <a:solidFill>
                   <a:srgbClr val="D6E5EF"/>
                 </a:solidFill>
@@ -9295,7 +9190,7 @@
               </a:rPr>
               <a:t> to clean.</a:t>
             </a:r>
-            <a:endParaRPr lang="en-US" sz="1550" dirty="0"/>
+            <a:endParaRPr lang="en-US" sz="1200" dirty="0"/>
           </a:p>
         </p:txBody>
       </p:sp>
@@ -9401,7 +9296,7 @@
               <a:buNone/>
             </a:pPr>
             <a:r>
-              <a:rPr lang="en-US" sz="1550" dirty="0">
+              <a:rPr lang="en-US" sz="1200" dirty="0">
                 <a:solidFill>
                   <a:srgbClr val="D6E5EF"/>
                 </a:solidFill>
@@ -9411,7 +9306,7 @@
               </a:rPr>
               <a:t>Poor data understanding leads to flawed models. Teams invest heavily here to avoid costly downstream errors.</a:t>
             </a:r>
-            <a:endParaRPr lang="en-US" sz="1550" dirty="0"/>
+            <a:endParaRPr lang="en-US" sz="1200" dirty="0"/>
           </a:p>
         </p:txBody>
       </p:sp>
@@ -9526,7 +9421,7 @@
               <a:buNone/>
             </a:pPr>
             <a:r>
-              <a:rPr lang="en-US" sz="1800" dirty="0">
+              <a:rPr lang="en-US" sz="2400" dirty="0">
                 <a:solidFill>
                   <a:srgbClr val="F98AC7"/>
                 </a:solidFill>
@@ -9536,7 +9431,7 @@
               </a:rPr>
               <a:t>The Complete EDA Workflow</a:t>
             </a:r>
-            <a:endParaRPr lang="en-US" sz="1800" dirty="0"/>
+            <a:endParaRPr lang="en-US" sz="2400" dirty="0"/>
           </a:p>
         </p:txBody>
       </p:sp>
@@ -10565,7 +10460,7 @@
         </p:nvSpPr>
         <p:spPr>
           <a:xfrm>
-            <a:off x="698086" y="3941266"/>
+            <a:off x="817740" y="3941266"/>
             <a:ext cx="2346762" cy="293291"/>
           </a:xfrm>
           <a:prstGeom prst="rect">
@@ -10607,7 +10502,7 @@
         </p:nvSpPr>
         <p:spPr>
           <a:xfrm>
-            <a:off x="698086" y="4354215"/>
+            <a:off x="244794" y="4354314"/>
             <a:ext cx="2511858" cy="1595934"/>
           </a:xfrm>
           <a:prstGeom prst="rect">
@@ -10622,14 +10517,14 @@
           </a:bodyPr>
           <a:lstStyle/>
           <a:p>
-            <a:pPr marL="0" indent="0" algn="l">
+            <a:pPr marL="0" indent="0" algn="ctr">
               <a:lnSpc>
                 <a:spcPct val="133000"/>
               </a:lnSpc>
               <a:buNone/>
             </a:pPr>
             <a:r>
-              <a:rPr lang="en-US" sz="1550" dirty="0">
+              <a:rPr lang="en-US" sz="1200" dirty="0">
                 <a:solidFill>
                   <a:srgbClr val="D6E5EF"/>
                 </a:solidFill>
@@ -10639,7 +10534,7 @@
               </a:rPr>
               <a:t>Reveals distribution shape, skewness, and modality. Business use: spot customer age clusters or sales seasonality.</a:t>
             </a:r>
-            <a:endParaRPr lang="en-US" sz="1550" dirty="0"/>
+            <a:endParaRPr lang="en-US" sz="1200" dirty="0"/>
           </a:p>
         </p:txBody>
       </p:sp>
@@ -10675,7 +10570,7 @@
         </p:nvSpPr>
         <p:spPr>
           <a:xfrm>
-            <a:off x="3459274" y="3941266"/>
+            <a:off x="3726315" y="3907167"/>
             <a:ext cx="2346762" cy="293291"/>
           </a:xfrm>
           <a:prstGeom prst="rect">
@@ -10717,7 +10612,7 @@
         </p:nvSpPr>
         <p:spPr>
           <a:xfrm>
-            <a:off x="3459274" y="4354215"/>
+            <a:off x="3099766" y="4354215"/>
             <a:ext cx="2511858" cy="1595934"/>
           </a:xfrm>
           <a:prstGeom prst="rect">
@@ -10732,14 +10627,14 @@
           </a:bodyPr>
           <a:lstStyle/>
           <a:p>
-            <a:pPr marL="0" indent="0" algn="l">
+            <a:pPr marL="0" indent="0" algn="ctr">
               <a:lnSpc>
                 <a:spcPct val="133000"/>
               </a:lnSpc>
               <a:buNone/>
             </a:pPr>
             <a:r>
-              <a:rPr lang="en-US" sz="1550" dirty="0">
+              <a:rPr lang="en-US" sz="1200" dirty="0">
                 <a:solidFill>
                   <a:srgbClr val="D6E5EF"/>
                 </a:solidFill>
@@ -10747,7 +10642,18 @@
                 <a:ea typeface="Source Sans 3" pitchFamily="34" charset="-122"/>
                 <a:cs typeface="Source Sans 3" pitchFamily="34" charset="-120"/>
               </a:rPr>
-              <a:t>Shows median, quartiles, and outliers at a glance. Business use: compare spending distributions across segments.</a:t>
+              <a:t>Shows median, quartiles, and outliers at a glance. Business use: compare spending distributions across segments</a:t>
+            </a:r>
+            <a:r>
+              <a:rPr lang="en-US" sz="1550" dirty="0">
+                <a:solidFill>
+                  <a:srgbClr val="D6E5EF"/>
+                </a:solidFill>
+                <a:latin typeface="Source Sans 3" pitchFamily="34" charset="0"/>
+                <a:ea typeface="Source Sans 3" pitchFamily="34" charset="-122"/>
+                <a:cs typeface="Source Sans 3" pitchFamily="34" charset="-120"/>
+              </a:rPr>
+              <a:t>.</a:t>
             </a:r>
             <a:endParaRPr lang="en-US" sz="1550" dirty="0"/>
           </a:p>
@@ -10769,7 +10675,7 @@
         </p:blipFill>
         <p:spPr>
           <a:xfrm>
-            <a:off x="6220463" y="2791619"/>
+            <a:off x="6400640" y="2791619"/>
             <a:ext cx="1456792" cy="900311"/>
           </a:xfrm>
           <a:prstGeom prst="rect">
@@ -10785,7 +10691,7 @@
         </p:nvSpPr>
         <p:spPr>
           <a:xfrm>
-            <a:off x="6220463" y="3941266"/>
+            <a:off x="6503874" y="3899208"/>
             <a:ext cx="2346762" cy="293291"/>
           </a:xfrm>
           <a:prstGeom prst="rect">
@@ -10827,7 +10733,7 @@
         </p:nvSpPr>
         <p:spPr>
           <a:xfrm>
-            <a:off x="6220463" y="4354215"/>
+            <a:off x="6001295" y="4354314"/>
             <a:ext cx="2511858" cy="1276747"/>
           </a:xfrm>
           <a:prstGeom prst="rect">
@@ -10842,14 +10748,14 @@
           </a:bodyPr>
           <a:lstStyle/>
           <a:p>
-            <a:pPr marL="0" indent="0" algn="l">
+            <a:pPr marL="0" indent="0" algn="ctr">
               <a:lnSpc>
                 <a:spcPct val="133000"/>
               </a:lnSpc>
               <a:buNone/>
             </a:pPr>
             <a:r>
-              <a:rPr lang="en-US" sz="1550" dirty="0">
+              <a:rPr lang="en-US" sz="1200" dirty="0">
                 <a:solidFill>
                   <a:srgbClr val="D6E5EF"/>
                 </a:solidFill>
@@ -10857,7 +10763,18 @@
                 <a:ea typeface="Source Sans 3" pitchFamily="34" charset="-122"/>
                 <a:cs typeface="Source Sans 3" pitchFamily="34" charset="-120"/>
               </a:rPr>
-              <a:t>Smoothed distribution highlighting peaks and tails. Business use: identify most common transaction values.</a:t>
+              <a:t>Smoothed distribution highlighting peaks and tails. Business use: identify most common transaction values</a:t>
+            </a:r>
+            <a:r>
+              <a:rPr lang="en-US" sz="1550" dirty="0">
+                <a:solidFill>
+                  <a:srgbClr val="D6E5EF"/>
+                </a:solidFill>
+                <a:latin typeface="Source Sans 3" pitchFamily="34" charset="0"/>
+                <a:ea typeface="Source Sans 3" pitchFamily="34" charset="-122"/>
+                <a:cs typeface="Source Sans 3" pitchFamily="34" charset="-120"/>
+              </a:rPr>
+              <a:t>.</a:t>
             </a:r>
             <a:endParaRPr lang="en-US" sz="1550" dirty="0"/>
           </a:p>
@@ -10879,7 +10796,7 @@
         </p:blipFill>
         <p:spPr>
           <a:xfrm>
-            <a:off x="8981652" y="2791619"/>
+            <a:off x="9135802" y="2783041"/>
             <a:ext cx="1456892" cy="900410"/>
           </a:xfrm>
           <a:prstGeom prst="rect">
@@ -10895,7 +10812,7 @@
         </p:nvSpPr>
         <p:spPr>
           <a:xfrm>
-            <a:off x="8981652" y="3941366"/>
+            <a:off x="9419313" y="3922749"/>
             <a:ext cx="2346762" cy="293291"/>
           </a:xfrm>
           <a:prstGeom prst="rect">
@@ -10952,14 +10869,14 @@
           </a:bodyPr>
           <a:lstStyle/>
           <a:p>
-            <a:pPr marL="0" indent="0" algn="l">
+            <a:pPr marL="0" indent="0" algn="ctr">
               <a:lnSpc>
                 <a:spcPct val="133000"/>
               </a:lnSpc>
               <a:buNone/>
             </a:pPr>
             <a:r>
-              <a:rPr lang="en-US" sz="1550" dirty="0">
+              <a:rPr lang="en-US" sz="1200" dirty="0">
                 <a:solidFill>
                   <a:srgbClr val="D6E5EF"/>
                 </a:solidFill>
@@ -10969,7 +10886,7 @@
               </a:rPr>
               <a:t>Compares categorical frequencies. Business use: product category performance or regional breakdowns.</a:t>
             </a:r>
-            <a:endParaRPr lang="en-US" sz="1550" dirty="0"/>
+            <a:endParaRPr lang="en-US" sz="1200" dirty="0"/>
           </a:p>
         </p:txBody>
       </p:sp>
